--- a/diagrams/aug/hal-script/script.pptx
+++ b/diagrams/aug/hal-script/script.pptx
@@ -3114,7 +3114,7 @@
               <a:defRPr sz="2000" b="0"/>
             </a:pPr>
             <a:r>
-              <a:t>Script Hallucination Heatmap</a:t>
+              <a:t>Script Hallucination Heatmap (%)</a:t>
             </a:r>
           </a:p>
         </p:txBody>
@@ -3136,7 +3136,7 @@
         <p:spPr>
           <a:xfrm>
             <a:off x="457200" y="731520"/>
-            <a:ext cx="7772400" cy="4786144"/>
+            <a:ext cx="7772400" cy="4798086"/>
           </a:xfrm>
           <a:prstGeom prst="rect">
             <a:avLst/>

--- a/diagrams/aug/hal-script/script.pptx
+++ b/diagrams/aug/hal-script/script.pptx
@@ -3136,7 +3136,7 @@
         <p:spPr>
           <a:xfrm>
             <a:off x="457200" y="731520"/>
-            <a:ext cx="7772400" cy="4798086"/>
+            <a:ext cx="7772400" cy="4499107"/>
           </a:xfrm>
           <a:prstGeom prst="rect">
             <a:avLst/>
